--- a/03_slide_presentasi/PERTEMUAN_07_Clean_Architecture_dan_Design_Pattern.pptx
+++ b/03_slide_presentasi/PERTEMUAN_07_Clean_Architecture_dan_Design_Pattern.pptx
@@ -11461,7 +11461,7 @@
               </a:defRPr>
             </a:pPr>
             <a:r>
-              <a:t>✔  Tampilkan daftar produk secara reaktif menggunakan BlocBuilder dan floating action button untuk refresh data!</a:t>
+              <a:t>✔  Terapkan 4 Status UI (Initial, Loading, Loaded, Error) secara reaktif dengan tombol muat ulang dan simulasi error server!</a:t>
             </a:r>
           </a:p>
           <a:p>
@@ -11477,7 +11477,7 @@
               </a:defRPr>
             </a:pPr>
             <a:r>
-              <a:t>✔  Target Pengujian: Jalankan di browser Chrome ('flutter run -d chrome') dan buktikan bahwa pemanggilan data terisolasi rapi!</a:t>
+              <a:t>✔  Target Pengujian: Jalankan di browser Chrome ('flutter run -d chrome') dan buktikan seluruh alur terisolasi rapi!</a:t>
             </a:r>
           </a:p>
         </p:txBody>

--- a/03_slide_presentasi/PERTEMUAN_07_Clean_Architecture_dan_Design_Pattern.pptx
+++ b/03_slide_presentasi/PERTEMUAN_07_Clean_Architecture_dan_Design_Pattern.pptx
@@ -3864,7 +3864,7 @@
               </a:defRPr>
             </a:pPr>
             <a:r>
-              <a:t>💡 KONSEP INTI &amp; ANALOGI AWAM</a:t>
+              <a:t>💡 KONSEP INTI &amp; ANALOGI DUNIA NYATA</a:t>
             </a:r>
           </a:p>
         </p:txBody>
@@ -4797,7 +4797,7 @@
               </a:defRPr>
             </a:pPr>
             <a:r>
-              <a:t>💡 KONSEP INTI &amp; ANALOGI AWAM</a:t>
+              <a:t>💡 KONSEP INTI &amp; ANALOGI DUNIA NYATA</a:t>
             </a:r>
           </a:p>
         </p:txBody>
@@ -5733,7 +5733,7 @@
               </a:defRPr>
             </a:pPr>
             <a:r>
-              <a:t>💡 KONSEP INTI &amp; ANALOGI AWAM</a:t>
+              <a:t>💡 KONSEP INTI &amp; ANALOGI DUNIA NYATA</a:t>
             </a:r>
           </a:p>
         </p:txBody>
@@ -6666,7 +6666,7 @@
               </a:defRPr>
             </a:pPr>
             <a:r>
-              <a:t>💡 KONSEP INTI &amp; ANALOGI AWAM</a:t>
+              <a:t>💡 KONSEP INTI &amp; ANALOGI DUNIA NYATA</a:t>
             </a:r>
           </a:p>
         </p:txBody>
@@ -7588,7 +7588,7 @@
               </a:defRPr>
             </a:pPr>
             <a:r>
-              <a:t>💡 KONSEP INTI &amp; ANALOGI AWAM</a:t>
+              <a:t>💡 KONSEP INTI &amp; ANALOGI DUNIA NYATA</a:t>
             </a:r>
           </a:p>
         </p:txBody>
@@ -8521,7 +8521,7 @@
               </a:defRPr>
             </a:pPr>
             <a:r>
-              <a:t>💡 KONSEP INTI &amp; ANALOGI AWAM</a:t>
+              <a:t>💡 KONSEP INTI &amp; ANALOGI DUNIA NYATA</a:t>
             </a:r>
           </a:p>
         </p:txBody>
@@ -9450,7 +9450,7 @@
               </a:defRPr>
             </a:pPr>
             <a:r>
-              <a:t>💡 KONSEP INTI &amp; ANALOGI AWAM</a:t>
+              <a:t>💡 KONSEP INTI &amp; ANALOGI DUNIA NYATA</a:t>
             </a:r>
           </a:p>
         </p:txBody>
@@ -10398,7 +10398,7 @@
               </a:defRPr>
             </a:pPr>
             <a:r>
-              <a:t>💡 KONSEP INTI &amp; ANALOGI AWAM</a:t>
+              <a:t>💡 KONSEP INTI &amp; ANALOGI DUNIA NYATA</a:t>
             </a:r>
           </a:p>
         </p:txBody>
@@ -11996,7 +11996,7 @@
               </a:defRPr>
             </a:pPr>
             <a:r>
-              <a:t>💡 KONSEP INTI &amp; ANALOGI AWAM</a:t>
+              <a:t>💡 KONSEP INTI &amp; ANALOGI DUNIA NYATA</a:t>
             </a:r>
           </a:p>
         </p:txBody>
@@ -12925,7 +12925,7 @@
               </a:defRPr>
             </a:pPr>
             <a:r>
-              <a:t>💡 KONSEP INTI &amp; ANALOGI AWAM</a:t>
+              <a:t>💡 KONSEP INTI &amp; ANALOGI DUNIA NYATA</a:t>
             </a:r>
           </a:p>
         </p:txBody>
@@ -13850,7 +13850,7 @@
               </a:defRPr>
             </a:pPr>
             <a:r>
-              <a:t>💡 KONSEP INTI &amp; ANALOGI AWAM</a:t>
+              <a:t>💡 KONSEP INTI &amp; ANALOGI DUNIA NYATA</a:t>
             </a:r>
           </a:p>
         </p:txBody>
@@ -14766,7 +14766,7 @@
               </a:defRPr>
             </a:pPr>
             <a:r>
-              <a:t>💡 KONSEP INTI &amp; ANALOGI AWAM</a:t>
+              <a:t>💡 KONSEP INTI &amp; ANALOGI DUNIA NYATA</a:t>
             </a:r>
           </a:p>
         </p:txBody>
@@ -15702,7 +15702,7 @@
               </a:defRPr>
             </a:pPr>
             <a:r>
-              <a:t>💡 KONSEP INTI &amp; ANALOGI AWAM</a:t>
+              <a:t>💡 KONSEP INTI &amp; ANALOGI DUNIA NYATA</a:t>
             </a:r>
           </a:p>
         </p:txBody>
@@ -16649,7 +16649,7 @@
               </a:defRPr>
             </a:pPr>
             <a:r>
-              <a:t>💡 KONSEP INTI &amp; ANALOGI AWAM</a:t>
+              <a:t>💡 KONSEP INTI &amp; ANALOGI DUNIA NYATA</a:t>
             </a:r>
           </a:p>
         </p:txBody>
@@ -17578,7 +17578,7 @@
               </a:defRPr>
             </a:pPr>
             <a:r>
-              <a:t>💡 KONSEP INTI &amp; ANALOGI AWAM</a:t>
+              <a:t>💡 KONSEP INTI &amp; ANALOGI DUNIA NYATA</a:t>
             </a:r>
           </a:p>
         </p:txBody>
@@ -18504,7 +18504,7 @@
               </a:defRPr>
             </a:pPr>
             <a:r>
-              <a:t>💡 KONSEP INTI &amp; ANALOGI AWAM</a:t>
+              <a:t>💡 KONSEP INTI &amp; ANALOGI DUNIA NYATA</a:t>
             </a:r>
           </a:p>
         </p:txBody>

--- a/03_slide_presentasi/PERTEMUAN_07_Clean_Architecture_dan_Design_Pattern.pptx
+++ b/03_slide_presentasi/PERTEMUAN_07_Clean_Architecture_dan_Design_Pattern.pptx
@@ -18335,7 +18335,7 @@
               </a:defRPr>
             </a:pPr>
             <a:r>
-              <a:t>Model DTO: Baju Dalam Kardus Ekspedisi Pengiriman</a:t>
+              <a:t>Model DTO: Paket Pembungkus Data Ekspedisi</a:t>
             </a:r>
           </a:p>
         </p:txBody>
@@ -18543,7 +18543,7 @@
               </a:defRPr>
             </a:pPr>
             <a:r>
-              <a:t>■  📦 Analogi Kardus Ekspedisi: Baju dibungkus kardus berlabel alamat (DTO) selama perjalanan truk, lalu dikeluarkan untuk dipakai rapi oleh manusia (Entity).</a:t>
+              <a:t>■  📦 Analogi Paket Ekspedisi: Data dibungkus lapisan pembungkus transfer (DTO) selama transmisi jaringan, lalu dikonversi menjadi entitas murni (Entity) untuk dipakai oleh logika domain.</a:t>
             </a:r>
           </a:p>
           <a:p>
